--- a/tests/fixtures/with_metadata.pptx
+++ b/tests/fixtures/with_metadata.pptx
@@ -26,11 +26,8 @@
           <a:bodyPr/>
           <a:p>
             <a:r>
-              <a:t>@section: CI/CD
-@feature: Pipeline
-@tags: devops, 自动化
-@status: stable
-@owner: 张三
+              <a:t>@tags: devops, 自动化
+@tag-start: Pipeline
 ---
 备注内容</a:t>
             </a:r>
@@ -58,9 +55,7 @@
           <a:bodyPr/>
           <a:p>
             <a:r>
-              <a:t>@section: CI/CD
-@feature: Runner
-@status: stable
+              <a:t>@tags: 重点
 ---
 第二页备注</a:t>
             </a:r>
@@ -88,8 +83,7 @@
           <a:bodyPr/>
           <a:p>
             <a:r>
-              <a:t>@status: deprecated
-@owner: 李四
+              <a:t>@tag-end: Pipeline
 ---
 过时了</a:t>
             </a:r>
